--- a/4_challenge/MLPC2025_team-observe_task-04-classification_presentation.pptx
+++ b/4_challenge/MLPC2025_team-observe_task-04-classification_presentation.pptx
@@ -5,16 +5,19 @@
     <p:sldMasterId id="2147483660" r:id="rId1"/>
   </p:sldMasterIdLst>
   <p:notesMasterIdLst>
-    <p:notesMasterId r:id="rId6"/>
+    <p:notesMasterId r:id="rId9"/>
   </p:notesMasterIdLst>
   <p:handoutMasterIdLst>
-    <p:handoutMasterId r:id="rId7"/>
+    <p:handoutMasterId r:id="rId10"/>
   </p:handoutMasterIdLst>
   <p:sldIdLst>
     <p:sldId id="257" r:id="rId2"/>
     <p:sldId id="266" r:id="rId3"/>
     <p:sldId id="267" r:id="rId4"/>
     <p:sldId id="268" r:id="rId5"/>
+    <p:sldId id="269" r:id="rId6"/>
+    <p:sldId id="270" r:id="rId7"/>
+    <p:sldId id="271" r:id="rId8"/>
   </p:sldIdLst>
   <p:sldSz cx="12192000" cy="6858000"/>
   <p:notesSz cx="7102475" cy="10234613"/>
@@ -139,7 +142,7 @@
 <file path=ppt/revisionInfo.xml><?xml version="1.0" encoding="utf-8"?>
 <p1510:revInfo xmlns:a="http://schemas.openxmlformats.org/drawingml/2006/main" xmlns:r="http://schemas.openxmlformats.org/officeDocument/2006/relationships" xmlns:p1510="http://schemas.microsoft.com/office/powerpoint/2015/10/main">
   <p1510:revLst>
-    <p1510:client id="{0BB332F3-3AA9-4FC8-91D6-B6DAA8FC7ADC}" v="2" dt="2025-06-19T09:02:43.087"/>
+    <p1510:client id="{0BB332F3-3AA9-4FC8-91D6-B6DAA8FC7ADC}" v="82" dt="2025-06-19T09:37:24.448"/>
   </p1510:revLst>
 </p1510:revInfo>
 </file>
@@ -149,7 +152,7 @@
   <pc:docChgLst>
     <pc:chgData name="Leo Spanring" userId="89e00baaf65da206" providerId="LiveId" clId="{0BB332F3-3AA9-4FC8-91D6-B6DAA8FC7ADC}"/>
     <pc:docChg chg="undo custSel addSld delSld modSld sldOrd">
-      <pc:chgData name="Leo Spanring" userId="89e00baaf65da206" providerId="LiveId" clId="{0BB332F3-3AA9-4FC8-91D6-B6DAA8FC7ADC}" dt="2025-06-19T09:03:12.101" v="569" actId="680"/>
+      <pc:chgData name="Leo Spanring" userId="89e00baaf65da206" providerId="LiveId" clId="{0BB332F3-3AA9-4FC8-91D6-B6DAA8FC7ADC}" dt="2025-06-19T09:37:46.820" v="1784" actId="14100"/>
       <pc:docMkLst>
         <pc:docMk/>
       </pc:docMkLst>
@@ -286,12 +289,36 @@
           </ac:picMkLst>
         </pc:picChg>
       </pc:sldChg>
-      <pc:sldChg chg="new">
-        <pc:chgData name="Leo Spanring" userId="89e00baaf65da206" providerId="LiveId" clId="{0BB332F3-3AA9-4FC8-91D6-B6DAA8FC7ADC}" dt="2025-06-19T09:03:12.101" v="569" actId="680"/>
+      <pc:sldChg chg="addSp modSp new mod">
+        <pc:chgData name="Leo Spanring" userId="89e00baaf65da206" providerId="LiveId" clId="{0BB332F3-3AA9-4FC8-91D6-B6DAA8FC7ADC}" dt="2025-06-19T09:35:25.863" v="1684" actId="14100"/>
         <pc:sldMkLst>
           <pc:docMk/>
           <pc:sldMk cId="279478281" sldId="268"/>
         </pc:sldMkLst>
+        <pc:spChg chg="mod">
+          <ac:chgData name="Leo Spanring" userId="89e00baaf65da206" providerId="LiveId" clId="{0BB332F3-3AA9-4FC8-91D6-B6DAA8FC7ADC}" dt="2025-06-19T09:23:26.927" v="929" actId="20577"/>
+          <ac:spMkLst>
+            <pc:docMk/>
+            <pc:sldMk cId="279478281" sldId="268"/>
+            <ac:spMk id="2" creationId="{775B54F4-C500-2F31-508A-64429E944547}"/>
+          </ac:spMkLst>
+        </pc:spChg>
+        <pc:spChg chg="mod">
+          <ac:chgData name="Leo Spanring" userId="89e00baaf65da206" providerId="LiveId" clId="{0BB332F3-3AA9-4FC8-91D6-B6DAA8FC7ADC}" dt="2025-06-19T09:23:32.572" v="931" actId="20577"/>
+          <ac:spMkLst>
+            <pc:docMk/>
+            <pc:sldMk cId="279478281" sldId="268"/>
+            <ac:spMk id="3" creationId="{5322457B-82B4-FC88-DAA9-EA46A2F9B677}"/>
+          </ac:spMkLst>
+        </pc:spChg>
+        <pc:picChg chg="add mod">
+          <ac:chgData name="Leo Spanring" userId="89e00baaf65da206" providerId="LiveId" clId="{0BB332F3-3AA9-4FC8-91D6-B6DAA8FC7ADC}" dt="2025-06-19T09:35:25.863" v="1684" actId="14100"/>
+          <ac:picMkLst>
+            <pc:docMk/>
+            <pc:sldMk cId="279478281" sldId="268"/>
+            <ac:picMk id="6" creationId="{8C5BCE1A-EBCC-4DD0-6305-AFBC0968798E}"/>
+          </ac:picMkLst>
+        </pc:picChg>
       </pc:sldChg>
       <pc:sldChg chg="new del ord">
         <pc:chgData name="Leo Spanring" userId="89e00baaf65da206" providerId="LiveId" clId="{0BB332F3-3AA9-4FC8-91D6-B6DAA8FC7ADC}" dt="2025-06-19T08:57:46.165" v="417" actId="47"/>
@@ -322,6 +349,123 @@
             <ac:spMk id="3" creationId="{4CCA6585-2349-1477-9148-717A5310AFA4}"/>
           </ac:spMkLst>
         </pc:spChg>
+      </pc:sldChg>
+      <pc:sldChg chg="addSp delSp modSp new mod">
+        <pc:chgData name="Leo Spanring" userId="89e00baaf65da206" providerId="LiveId" clId="{0BB332F3-3AA9-4FC8-91D6-B6DAA8FC7ADC}" dt="2025-06-19T09:35:28.427" v="1685"/>
+        <pc:sldMkLst>
+          <pc:docMk/>
+          <pc:sldMk cId="3923991960" sldId="269"/>
+        </pc:sldMkLst>
+        <pc:spChg chg="mod">
+          <ac:chgData name="Leo Spanring" userId="89e00baaf65da206" providerId="LiveId" clId="{0BB332F3-3AA9-4FC8-91D6-B6DAA8FC7ADC}" dt="2025-06-19T09:25:48.218" v="953" actId="20577"/>
+          <ac:spMkLst>
+            <pc:docMk/>
+            <pc:sldMk cId="3923991960" sldId="269"/>
+            <ac:spMk id="2" creationId="{AB0CFA63-AF6A-3D98-59C9-90B878C8BA1F}"/>
+          </ac:spMkLst>
+        </pc:spChg>
+        <pc:spChg chg="mod">
+          <ac:chgData name="Leo Spanring" userId="89e00baaf65da206" providerId="LiveId" clId="{0BB332F3-3AA9-4FC8-91D6-B6DAA8FC7ADC}" dt="2025-06-19T09:31:33.096" v="1431" actId="20577"/>
+          <ac:spMkLst>
+            <pc:docMk/>
+            <pc:sldMk cId="3923991960" sldId="269"/>
+            <ac:spMk id="3" creationId="{10A333E3-5186-9517-D408-CD74007E4DBD}"/>
+          </ac:spMkLst>
+        </pc:spChg>
+        <pc:picChg chg="add del mod">
+          <ac:chgData name="Leo Spanring" userId="89e00baaf65da206" providerId="LiveId" clId="{0BB332F3-3AA9-4FC8-91D6-B6DAA8FC7ADC}" dt="2025-06-19T09:35:13.776" v="1680" actId="478"/>
+          <ac:picMkLst>
+            <pc:docMk/>
+            <pc:sldMk cId="3923991960" sldId="269"/>
+            <ac:picMk id="5" creationId="{A412E05C-9441-88E2-E5B1-3CCFA50C1E27}"/>
+          </ac:picMkLst>
+        </pc:picChg>
+        <pc:picChg chg="add mod">
+          <ac:chgData name="Leo Spanring" userId="89e00baaf65da206" providerId="LiveId" clId="{0BB332F3-3AA9-4FC8-91D6-B6DAA8FC7ADC}" dt="2025-06-19T09:35:28.427" v="1685"/>
+          <ac:picMkLst>
+            <pc:docMk/>
+            <pc:sldMk cId="3923991960" sldId="269"/>
+            <ac:picMk id="6" creationId="{811DDD8D-EF3E-4634-1A3B-EC406454B2C4}"/>
+          </ac:picMkLst>
+        </pc:picChg>
+      </pc:sldChg>
+      <pc:sldChg chg="addSp delSp modSp new mod">
+        <pc:chgData name="Leo Spanring" userId="89e00baaf65da206" providerId="LiveId" clId="{0BB332F3-3AA9-4FC8-91D6-B6DAA8FC7ADC}" dt="2025-06-19T09:35:30.530" v="1686"/>
+        <pc:sldMkLst>
+          <pc:docMk/>
+          <pc:sldMk cId="4100574274" sldId="270"/>
+        </pc:sldMkLst>
+        <pc:spChg chg="mod">
+          <ac:chgData name="Leo Spanring" userId="89e00baaf65da206" providerId="LiveId" clId="{0BB332F3-3AA9-4FC8-91D6-B6DAA8FC7ADC}" dt="2025-06-19T09:31:57.823" v="1454" actId="20577"/>
+          <ac:spMkLst>
+            <pc:docMk/>
+            <pc:sldMk cId="4100574274" sldId="270"/>
+            <ac:spMk id="2" creationId="{7D6355A8-2ACF-90FF-DCC2-B3CCA80A0938}"/>
+          </ac:spMkLst>
+        </pc:spChg>
+        <pc:spChg chg="mod">
+          <ac:chgData name="Leo Spanring" userId="89e00baaf65da206" providerId="LiveId" clId="{0BB332F3-3AA9-4FC8-91D6-B6DAA8FC7ADC}" dt="2025-06-19T09:34:53.061" v="1677" actId="20577"/>
+          <ac:spMkLst>
+            <pc:docMk/>
+            <pc:sldMk cId="4100574274" sldId="270"/>
+            <ac:spMk id="3" creationId="{FE99DE09-483B-1EFD-BA87-9F0A4765227F}"/>
+          </ac:spMkLst>
+        </pc:spChg>
+        <pc:picChg chg="add del mod">
+          <ac:chgData name="Leo Spanring" userId="89e00baaf65da206" providerId="LiveId" clId="{0BB332F3-3AA9-4FC8-91D6-B6DAA8FC7ADC}" dt="2025-06-19T09:35:15.645" v="1681" actId="478"/>
+          <ac:picMkLst>
+            <pc:docMk/>
+            <pc:sldMk cId="4100574274" sldId="270"/>
+            <ac:picMk id="5" creationId="{592FADDA-6FBB-9FD0-8F9E-2059B592AA9E}"/>
+          </ac:picMkLst>
+        </pc:picChg>
+        <pc:picChg chg="add mod">
+          <ac:chgData name="Leo Spanring" userId="89e00baaf65da206" providerId="LiveId" clId="{0BB332F3-3AA9-4FC8-91D6-B6DAA8FC7ADC}" dt="2025-06-19T09:35:30.530" v="1686"/>
+          <ac:picMkLst>
+            <pc:docMk/>
+            <pc:sldMk cId="4100574274" sldId="270"/>
+            <ac:picMk id="6" creationId="{0E81BE94-3A69-D2C8-6863-76ECC54018ED}"/>
+          </ac:picMkLst>
+        </pc:picChg>
+      </pc:sldChg>
+      <pc:sldChg chg="addSp delSp modSp new mod">
+        <pc:chgData name="Leo Spanring" userId="89e00baaf65da206" providerId="LiveId" clId="{0BB332F3-3AA9-4FC8-91D6-B6DAA8FC7ADC}" dt="2025-06-19T09:37:46.820" v="1784" actId="14100"/>
+        <pc:sldMkLst>
+          <pc:docMk/>
+          <pc:sldMk cId="2551820613" sldId="271"/>
+        </pc:sldMkLst>
+        <pc:spChg chg="mod">
+          <ac:chgData name="Leo Spanring" userId="89e00baaf65da206" providerId="LiveId" clId="{0BB332F3-3AA9-4FC8-91D6-B6DAA8FC7ADC}" dt="2025-06-19T09:36:09.641" v="1714" actId="20577"/>
+          <ac:spMkLst>
+            <pc:docMk/>
+            <pc:sldMk cId="2551820613" sldId="271"/>
+            <ac:spMk id="2" creationId="{DA5337F5-3B32-8045-60C2-5ADD51CE8CFC}"/>
+          </ac:spMkLst>
+        </pc:spChg>
+        <pc:spChg chg="add del mod">
+          <ac:chgData name="Leo Spanring" userId="89e00baaf65da206" providerId="LiveId" clId="{0BB332F3-3AA9-4FC8-91D6-B6DAA8FC7ADC}" dt="2025-06-19T09:37:21.664" v="1775" actId="20577"/>
+          <ac:spMkLst>
+            <pc:docMk/>
+            <pc:sldMk cId="2551820613" sldId="271"/>
+            <ac:spMk id="3" creationId="{058313B2-FAC2-6998-8053-D56F3456DB6B}"/>
+          </ac:spMkLst>
+        </pc:spChg>
+        <pc:picChg chg="add mod">
+          <ac:chgData name="Leo Spanring" userId="89e00baaf65da206" providerId="LiveId" clId="{0BB332F3-3AA9-4FC8-91D6-B6DAA8FC7ADC}" dt="2025-06-19T09:36:41.584" v="1725"/>
+          <ac:picMkLst>
+            <pc:docMk/>
+            <pc:sldMk cId="2551820613" sldId="271"/>
+            <ac:picMk id="6" creationId="{79F853DD-8CBE-3DEC-96AF-D54989FB5B81}"/>
+          </ac:picMkLst>
+        </pc:picChg>
+        <pc:picChg chg="add mod">
+          <ac:chgData name="Leo Spanring" userId="89e00baaf65da206" providerId="LiveId" clId="{0BB332F3-3AA9-4FC8-91D6-B6DAA8FC7ADC}" dt="2025-06-19T09:37:46.820" v="1784" actId="14100"/>
+          <ac:picMkLst>
+            <pc:docMk/>
+            <pc:sldMk cId="2551820613" sldId="271"/>
+            <ac:picMk id="8" creationId="{79F40DF3-858D-1827-D15D-C7A514576DE6}"/>
+          </ac:picMkLst>
+        </pc:picChg>
       </pc:sldChg>
       <pc:sldMasterChg chg="delSldLayout">
         <pc:chgData name="Leo Spanring" userId="89e00baaf65da206" providerId="LiveId" clId="{0BB332F3-3AA9-4FC8-91D6-B6DAA8FC7ADC}" dt="2025-06-19T08:57:51.979" v="421" actId="47"/>
@@ -7643,35 +7787,216 @@
           <a:bodyPr/>
           <a:lstStyle/>
           <a:p>
-            <a:endParaRPr lang="LID4096"/>
-          </a:p>
-        </p:txBody>
-      </p:sp>
-      <p:sp>
-        <p:nvSpPr>
-          <p:cNvPr id="3" name="Content Placeholder 2">
-            <a:extLst>
-              <a:ext uri="{FF2B5EF4-FFF2-40B4-BE49-F238E27FC236}">
-                <a16:creationId xmlns:a16="http://schemas.microsoft.com/office/drawing/2014/main" id="{5322457B-82B4-FC88-DAA9-EA46A2F9B677}"/>
-              </a:ext>
-            </a:extLst>
-          </p:cNvPr>
-          <p:cNvSpPr>
-            <a:spLocks noGrp="1"/>
-          </p:cNvSpPr>
-          <p:nvPr>
-            <p:ph idx="1"/>
-          </p:nvPr>
-        </p:nvSpPr>
-        <p:spPr/>
-        <p:txBody>
-          <a:bodyPr/>
-          <a:lstStyle/>
-          <a:p>
-            <a:endParaRPr lang="LID4096"/>
-          </a:p>
-        </p:txBody>
-      </p:sp>
+            <a:r>
+              <a:rPr lang="en-GB" dirty="0"/>
+              <a:t>Strategies to improve performance:</a:t>
+            </a:r>
+            <a:br>
+              <a:rPr lang="en-GB" dirty="0"/>
+            </a:br>
+            <a:r>
+              <a:rPr lang="en-GB" dirty="0"/>
+              <a:t>Variable Thresholds</a:t>
+            </a:r>
+            <a:endParaRPr lang="LID4096" dirty="0"/>
+          </a:p>
+        </p:txBody>
+      </p:sp>
+      <mc:AlternateContent xmlns:mc="http://schemas.openxmlformats.org/markup-compatibility/2006">
+        <mc:Choice xmlns:a14="http://schemas.microsoft.com/office/drawing/2010/main" Requires="a14">
+          <p:sp>
+            <p:nvSpPr>
+              <p:cNvPr id="3" name="Content Placeholder 2">
+                <a:extLst>
+                  <a:ext uri="{FF2B5EF4-FFF2-40B4-BE49-F238E27FC236}">
+                    <a16:creationId xmlns:a16="http://schemas.microsoft.com/office/drawing/2014/main" id="{5322457B-82B4-FC88-DAA9-EA46A2F9B677}"/>
+                  </a:ext>
+                </a:extLst>
+              </p:cNvPr>
+              <p:cNvSpPr>
+                <a:spLocks noGrp="1"/>
+              </p:cNvSpPr>
+              <p:nvPr>
+                <p:ph idx="1"/>
+              </p:nvPr>
+            </p:nvSpPr>
+            <p:spPr/>
+            <p:txBody>
+              <a:bodyPr/>
+              <a:lstStyle/>
+              <a:p>
+                <a:r>
+                  <a:rPr lang="en-GB" dirty="0"/>
+                  <a:t>Globally constant threshold ignores class imbalances.</a:t>
+                </a:r>
+              </a:p>
+              <a:p>
+                <a:r>
+                  <a:rPr lang="en-GB" dirty="0"/>
+                  <a:t>Threshold </a:t>
+                </a:r>
+                <a:r>
+                  <a:rPr lang="en-GB" dirty="0" err="1"/>
+                  <a:t>searchspace</a:t>
+                </a:r>
+                <a:r>
+                  <a:rPr lang="en-GB" dirty="0"/>
+                  <a:t> consists of values from 0 to 1.</a:t>
+                </a:r>
+              </a:p>
+              <a:p>
+                <a:r>
+                  <a:rPr lang="en-GB" dirty="0"/>
+                  <a:t>Thresholds are tuned after each validation epoch.</a:t>
+                </a:r>
+              </a:p>
+              <a:p>
+                <a:pPr lvl="1"/>
+                <a:r>
+                  <a:rPr lang="en-GB" dirty="0"/>
+                  <a:t>Utility function: </a:t>
+                </a:r>
+                <a14:m>
+                  <m:oMath xmlns:m="http://schemas.openxmlformats.org/officeDocument/2006/math">
+                    <m:r>
+                      <a:rPr lang="en-GB" b="0" i="1" smtClean="0">
+                        <a:latin typeface="Cambria Math" panose="02040503050406030204" pitchFamily="18" charset="0"/>
+                      </a:rPr>
+                      <m:t>𝑈</m:t>
+                    </m:r>
+                    <m:r>
+                      <a:rPr lang="en-GB" b="0" i="1" smtClean="0">
+                        <a:latin typeface="Cambria Math" panose="02040503050406030204" pitchFamily="18" charset="0"/>
+                      </a:rPr>
+                      <m:t>=</m:t>
+                    </m:r>
+                    <m:r>
+                      <a:rPr lang="en-GB" b="0" i="1" smtClean="0">
+                        <a:latin typeface="Cambria Math" panose="02040503050406030204" pitchFamily="18" charset="0"/>
+                      </a:rPr>
+                      <m:t>𝑇𝑃</m:t>
+                    </m:r>
+                    <m:r>
+                      <a:rPr lang="en-GB" b="0" i="1" smtClean="0">
+                        <a:latin typeface="Cambria Math" panose="02040503050406030204" pitchFamily="18" charset="0"/>
+                      </a:rPr>
+                      <m:t> −</m:t>
+                    </m:r>
+                    <m:sSub>
+                      <m:sSubPr>
+                        <m:ctrlPr>
+                          <a:rPr lang="en-GB" b="0" i="1" smtClean="0">
+                            <a:latin typeface="Cambria Math" panose="02040503050406030204" pitchFamily="18" charset="0"/>
+                          </a:rPr>
+                        </m:ctrlPr>
+                      </m:sSubPr>
+                      <m:e>
+                        <m:r>
+                          <a:rPr lang="en-GB" b="0" i="1" smtClean="0">
+                            <a:latin typeface="Cambria Math" panose="02040503050406030204" pitchFamily="18" charset="0"/>
+                          </a:rPr>
+                          <m:t>𝑐𝑜𝑠𝑡</m:t>
+                        </m:r>
+                      </m:e>
+                      <m:sub>
+                        <m:r>
+                          <a:rPr lang="en-GB" b="0" i="1" smtClean="0">
+                            <a:latin typeface="Cambria Math" panose="02040503050406030204" pitchFamily="18" charset="0"/>
+                          </a:rPr>
+                          <m:t>𝐹𝑃</m:t>
+                        </m:r>
+                      </m:sub>
+                    </m:sSub>
+                    <m:r>
+                      <a:rPr lang="en-GB" b="0" i="1" smtClean="0">
+                        <a:latin typeface="Cambria Math" panose="02040503050406030204" pitchFamily="18" charset="0"/>
+                      </a:rPr>
+                      <m:t>𝐹𝑃</m:t>
+                    </m:r>
+                    <m:r>
+                      <a:rPr lang="en-GB" b="0" i="1" smtClean="0">
+                        <a:latin typeface="Cambria Math" panose="02040503050406030204" pitchFamily="18" charset="0"/>
+                      </a:rPr>
+                      <m:t> −</m:t>
+                    </m:r>
+                    <m:sSub>
+                      <m:sSubPr>
+                        <m:ctrlPr>
+                          <a:rPr lang="en-GB" b="0" i="1" smtClean="0">
+                            <a:latin typeface="Cambria Math" panose="02040503050406030204" pitchFamily="18" charset="0"/>
+                          </a:rPr>
+                        </m:ctrlPr>
+                      </m:sSubPr>
+                      <m:e>
+                        <m:r>
+                          <a:rPr lang="en-GB" b="0" i="1" smtClean="0">
+                            <a:latin typeface="Cambria Math" panose="02040503050406030204" pitchFamily="18" charset="0"/>
+                          </a:rPr>
+                          <m:t>𝑐𝑜𝑠𝑡</m:t>
+                        </m:r>
+                      </m:e>
+                      <m:sub>
+                        <m:r>
+                          <a:rPr lang="en-GB" b="0" i="1" smtClean="0">
+                            <a:latin typeface="Cambria Math" panose="02040503050406030204" pitchFamily="18" charset="0"/>
+                          </a:rPr>
+                          <m:t>𝐹𝑁</m:t>
+                        </m:r>
+                      </m:sub>
+                    </m:sSub>
+                    <m:r>
+                      <a:rPr lang="en-GB" b="0" i="1" smtClean="0">
+                        <a:latin typeface="Cambria Math" panose="02040503050406030204" pitchFamily="18" charset="0"/>
+                      </a:rPr>
+                      <m:t>𝐹𝑁</m:t>
+                    </m:r>
+                  </m:oMath>
+                </a14:m>
+                <a:endParaRPr lang="LID4096" dirty="0"/>
+              </a:p>
+            </p:txBody>
+          </p:sp>
+        </mc:Choice>
+        <mc:Fallback>
+          <p:sp>
+            <p:nvSpPr>
+              <p:cNvPr id="3" name="Content Placeholder 2">
+                <a:extLst>
+                  <a:ext uri="{FF2B5EF4-FFF2-40B4-BE49-F238E27FC236}">
+                    <a16:creationId xmlns:a16="http://schemas.microsoft.com/office/drawing/2014/main" id="{5322457B-82B4-FC88-DAA9-EA46A2F9B677}"/>
+                  </a:ext>
+                </a:extLst>
+              </p:cNvPr>
+              <p:cNvSpPr>
+                <a:spLocks noGrp="1" noRot="1" noChangeAspect="1" noMove="1" noResize="1" noEditPoints="1" noAdjustHandles="1" noChangeArrowheads="1" noChangeShapeType="1" noTextEdit="1"/>
+              </p:cNvSpPr>
+              <p:nvPr>
+                <p:ph idx="1"/>
+              </p:nvPr>
+            </p:nvSpPr>
+            <p:spPr>
+              <a:blipFill>
+                <a:blip r:embed="rId2"/>
+                <a:stretch>
+                  <a:fillRect l="-711" t="-1754"/>
+                </a:stretch>
+              </a:blipFill>
+            </p:spPr>
+            <p:txBody>
+              <a:bodyPr/>
+              <a:lstStyle/>
+              <a:p>
+                <a:r>
+                  <a:rPr lang="LID4096">
+                    <a:noFill/>
+                  </a:rPr>
+                  <a:t> </a:t>
+                </a:r>
+              </a:p>
+            </p:txBody>
+          </p:sp>
+        </mc:Fallback>
+      </mc:AlternateContent>
       <p:sp>
         <p:nvSpPr>
           <p:cNvPr id="4" name="Text Placeholder 3">
@@ -7697,10 +8022,561 @@
           </a:p>
         </p:txBody>
       </p:sp>
+      <p:pic>
+        <p:nvPicPr>
+          <p:cNvPr id="6" name="Picture 5">
+            <a:extLst>
+              <a:ext uri="{FF2B5EF4-FFF2-40B4-BE49-F238E27FC236}">
+                <a16:creationId xmlns:a16="http://schemas.microsoft.com/office/drawing/2014/main" id="{8C5BCE1A-EBCC-4DD0-6305-AFBC0968798E}"/>
+              </a:ext>
+            </a:extLst>
+          </p:cNvPr>
+          <p:cNvPicPr>
+            <a:picLocks noChangeAspect="1"/>
+          </p:cNvPicPr>
+          <p:nvPr/>
+        </p:nvPicPr>
+        <p:blipFill>
+          <a:blip r:embed="rId3"/>
+          <a:stretch>
+            <a:fillRect/>
+          </a:stretch>
+        </p:blipFill>
+        <p:spPr>
+          <a:xfrm>
+            <a:off x="3668002" y="4289258"/>
+            <a:ext cx="4855996" cy="1419724"/>
+          </a:xfrm>
+          <a:prstGeom prst="rect">
+            <a:avLst/>
+          </a:prstGeom>
+        </p:spPr>
+      </p:pic>
     </p:spTree>
     <p:extLst>
       <p:ext uri="{BB962C8B-B14F-4D97-AF65-F5344CB8AC3E}">
         <p14:creationId xmlns:p14="http://schemas.microsoft.com/office/powerpoint/2010/main" val="279478281"/>
+      </p:ext>
+    </p:extLst>
+  </p:cSld>
+  <p:clrMapOvr>
+    <a:masterClrMapping/>
+  </p:clrMapOvr>
+</p:sld>
+</file>
+
+<file path=ppt/slides/slide5.xml><?xml version="1.0" encoding="utf-8"?>
+<p:sld xmlns:a="http://schemas.openxmlformats.org/drawingml/2006/main" xmlns:r="http://schemas.openxmlformats.org/officeDocument/2006/relationships" xmlns:p="http://schemas.openxmlformats.org/presentationml/2006/main">
+  <p:cSld>
+    <p:spTree>
+      <p:nvGrpSpPr>
+        <p:cNvPr id="1" name=""/>
+        <p:cNvGrpSpPr/>
+        <p:nvPr/>
+      </p:nvGrpSpPr>
+      <p:grpSpPr>
+        <a:xfrm>
+          <a:off x="0" y="0"/>
+          <a:ext cx="0" cy="0"/>
+          <a:chOff x="0" y="0"/>
+          <a:chExt cx="0" cy="0"/>
+        </a:xfrm>
+      </p:grpSpPr>
+      <p:sp>
+        <p:nvSpPr>
+          <p:cNvPr id="2" name="Title 1">
+            <a:extLst>
+              <a:ext uri="{FF2B5EF4-FFF2-40B4-BE49-F238E27FC236}">
+                <a16:creationId xmlns:a16="http://schemas.microsoft.com/office/drawing/2014/main" id="{AB0CFA63-AF6A-3D98-59C9-90B878C8BA1F}"/>
+              </a:ext>
+            </a:extLst>
+          </p:cNvPr>
+          <p:cNvSpPr>
+            <a:spLocks noGrp="1"/>
+          </p:cNvSpPr>
+          <p:nvPr>
+            <p:ph type="title"/>
+          </p:nvPr>
+        </p:nvSpPr>
+        <p:spPr/>
+        <p:txBody>
+          <a:bodyPr/>
+          <a:lstStyle/>
+          <a:p>
+            <a:r>
+              <a:rPr lang="en-GB" dirty="0"/>
+              <a:t>Strategies to improve performance:</a:t>
+            </a:r>
+            <a:br>
+              <a:rPr lang="en-GB" dirty="0"/>
+            </a:br>
+            <a:r>
+              <a:rPr lang="en-GB" dirty="0"/>
+              <a:t>Post Processing</a:t>
+            </a:r>
+            <a:endParaRPr lang="LID4096" dirty="0"/>
+          </a:p>
+        </p:txBody>
+      </p:sp>
+      <p:sp>
+        <p:nvSpPr>
+          <p:cNvPr id="3" name="Content Placeholder 2">
+            <a:extLst>
+              <a:ext uri="{FF2B5EF4-FFF2-40B4-BE49-F238E27FC236}">
+                <a16:creationId xmlns:a16="http://schemas.microsoft.com/office/drawing/2014/main" id="{10A333E3-5186-9517-D408-CD74007E4DBD}"/>
+              </a:ext>
+            </a:extLst>
+          </p:cNvPr>
+          <p:cNvSpPr>
+            <a:spLocks noGrp="1"/>
+          </p:cNvSpPr>
+          <p:nvPr>
+            <p:ph idx="1"/>
+          </p:nvPr>
+        </p:nvSpPr>
+        <p:spPr/>
+        <p:txBody>
+          <a:bodyPr/>
+          <a:lstStyle/>
+          <a:p>
+            <a:r>
+              <a:rPr lang="en-GB" dirty="0"/>
+              <a:t>Spurious positive class predictions lasting only a few frames could have a big effect on overall performance.</a:t>
+            </a:r>
+          </a:p>
+          <a:p>
+            <a:pPr lvl="1"/>
+            <a:r>
+              <a:rPr lang="en-GB" dirty="0"/>
+              <a:t>Amplified by weighted loss function: Model more pushed toward predicting positive</a:t>
+            </a:r>
+          </a:p>
+          <a:p>
+            <a:r>
+              <a:rPr lang="en-GB" dirty="0"/>
+              <a:t>Post-processing strategy:</a:t>
+            </a:r>
+          </a:p>
+          <a:p>
+            <a:pPr lvl="1"/>
+            <a:r>
+              <a:rPr lang="en-GB" dirty="0"/>
+              <a:t>Predictions lasting only a few frames get discarded.</a:t>
+            </a:r>
+          </a:p>
+          <a:p>
+            <a:pPr lvl="1"/>
+            <a:r>
+              <a:rPr lang="en-GB" dirty="0"/>
+              <a:t>Best result for rejecting positive predictions lasting less than 3 frames.</a:t>
+            </a:r>
+          </a:p>
+        </p:txBody>
+      </p:sp>
+      <p:sp>
+        <p:nvSpPr>
+          <p:cNvPr id="4" name="Text Placeholder 3">
+            <a:extLst>
+              <a:ext uri="{FF2B5EF4-FFF2-40B4-BE49-F238E27FC236}">
+                <a16:creationId xmlns:a16="http://schemas.microsoft.com/office/drawing/2014/main" id="{66B6CC3A-FFD7-72BD-CCFC-0FC8F75DFF1A}"/>
+              </a:ext>
+            </a:extLst>
+          </p:cNvPr>
+          <p:cNvSpPr>
+            <a:spLocks noGrp="1"/>
+          </p:cNvSpPr>
+          <p:nvPr>
+            <p:ph type="body" sz="quarter" idx="25"/>
+          </p:nvPr>
+        </p:nvSpPr>
+        <p:spPr/>
+        <p:txBody>
+          <a:bodyPr/>
+          <a:lstStyle/>
+          <a:p>
+            <a:endParaRPr lang="LID4096"/>
+          </a:p>
+        </p:txBody>
+      </p:sp>
+      <p:pic>
+        <p:nvPicPr>
+          <p:cNvPr id="6" name="Picture 5">
+            <a:extLst>
+              <a:ext uri="{FF2B5EF4-FFF2-40B4-BE49-F238E27FC236}">
+                <a16:creationId xmlns:a16="http://schemas.microsoft.com/office/drawing/2014/main" id="{811DDD8D-EF3E-4634-1A3B-EC406454B2C4}"/>
+              </a:ext>
+            </a:extLst>
+          </p:cNvPr>
+          <p:cNvPicPr>
+            <a:picLocks noChangeAspect="1"/>
+          </p:cNvPicPr>
+          <p:nvPr/>
+        </p:nvPicPr>
+        <p:blipFill>
+          <a:blip r:embed="rId2"/>
+          <a:stretch>
+            <a:fillRect/>
+          </a:stretch>
+        </p:blipFill>
+        <p:spPr>
+          <a:xfrm>
+            <a:off x="3668002" y="4289258"/>
+            <a:ext cx="4855996" cy="1419724"/>
+          </a:xfrm>
+          <a:prstGeom prst="rect">
+            <a:avLst/>
+          </a:prstGeom>
+        </p:spPr>
+      </p:pic>
+    </p:spTree>
+    <p:extLst>
+      <p:ext uri="{BB962C8B-B14F-4D97-AF65-F5344CB8AC3E}">
+        <p14:creationId xmlns:p14="http://schemas.microsoft.com/office/powerpoint/2010/main" val="3923991960"/>
+      </p:ext>
+    </p:extLst>
+  </p:cSld>
+  <p:clrMapOvr>
+    <a:masterClrMapping/>
+  </p:clrMapOvr>
+</p:sld>
+</file>
+
+<file path=ppt/slides/slide6.xml><?xml version="1.0" encoding="utf-8"?>
+<p:sld xmlns:a="http://schemas.openxmlformats.org/drawingml/2006/main" xmlns:r="http://schemas.openxmlformats.org/officeDocument/2006/relationships" xmlns:p="http://schemas.openxmlformats.org/presentationml/2006/main">
+  <p:cSld>
+    <p:spTree>
+      <p:nvGrpSpPr>
+        <p:cNvPr id="1" name=""/>
+        <p:cNvGrpSpPr/>
+        <p:nvPr/>
+      </p:nvGrpSpPr>
+      <p:grpSpPr>
+        <a:xfrm>
+          <a:off x="0" y="0"/>
+          <a:ext cx="0" cy="0"/>
+          <a:chOff x="0" y="0"/>
+          <a:chExt cx="0" cy="0"/>
+        </a:xfrm>
+      </p:grpSpPr>
+      <p:sp>
+        <p:nvSpPr>
+          <p:cNvPr id="2" name="Title 1">
+            <a:extLst>
+              <a:ext uri="{FF2B5EF4-FFF2-40B4-BE49-F238E27FC236}">
+                <a16:creationId xmlns:a16="http://schemas.microsoft.com/office/drawing/2014/main" id="{7D6355A8-2ACF-90FF-DCC2-B3CCA80A0938}"/>
+              </a:ext>
+            </a:extLst>
+          </p:cNvPr>
+          <p:cNvSpPr>
+            <a:spLocks noGrp="1"/>
+          </p:cNvSpPr>
+          <p:nvPr>
+            <p:ph type="title"/>
+          </p:nvPr>
+        </p:nvSpPr>
+        <p:spPr/>
+        <p:txBody>
+          <a:bodyPr/>
+          <a:lstStyle/>
+          <a:p>
+            <a:r>
+              <a:rPr lang="en-GB" dirty="0"/>
+              <a:t>Strategies to improve performance:</a:t>
+            </a:r>
+            <a:br>
+              <a:rPr lang="en-GB" dirty="0"/>
+            </a:br>
+            <a:r>
+              <a:rPr lang="en-GB" dirty="0"/>
+              <a:t>Hyperparameter Tuning</a:t>
+            </a:r>
+            <a:endParaRPr lang="LID4096" dirty="0"/>
+          </a:p>
+        </p:txBody>
+      </p:sp>
+      <p:sp>
+        <p:nvSpPr>
+          <p:cNvPr id="3" name="Content Placeholder 2">
+            <a:extLst>
+              <a:ext uri="{FF2B5EF4-FFF2-40B4-BE49-F238E27FC236}">
+                <a16:creationId xmlns:a16="http://schemas.microsoft.com/office/drawing/2014/main" id="{FE99DE09-483B-1EFD-BA87-9F0A4765227F}"/>
+              </a:ext>
+            </a:extLst>
+          </p:cNvPr>
+          <p:cNvSpPr>
+            <a:spLocks noGrp="1"/>
+          </p:cNvSpPr>
+          <p:nvPr>
+            <p:ph idx="1"/>
+          </p:nvPr>
+        </p:nvSpPr>
+        <p:spPr/>
+        <p:txBody>
+          <a:bodyPr/>
+          <a:lstStyle/>
+          <a:p>
+            <a:r>
+              <a:rPr lang="en-GB" dirty="0"/>
+              <a:t>Tested hyperparameters:</a:t>
+            </a:r>
+          </a:p>
+          <a:p>
+            <a:pPr lvl="1"/>
+            <a:r>
+              <a:rPr lang="en-GB" dirty="0"/>
+              <a:t>Optimizers: Adam, </a:t>
+            </a:r>
+            <a:r>
+              <a:rPr lang="en-GB" dirty="0" err="1"/>
+              <a:t>AdamW</a:t>
+            </a:r>
+            <a:endParaRPr lang="en-GB" dirty="0"/>
+          </a:p>
+          <a:p>
+            <a:pPr lvl="1"/>
+            <a:r>
+              <a:rPr lang="en-GB" dirty="0"/>
+              <a:t>Batch sizes: 32, 64, 128, 256</a:t>
+            </a:r>
+          </a:p>
+          <a:p>
+            <a:pPr lvl="1"/>
+            <a:r>
+              <a:rPr lang="en-GB" dirty="0"/>
+              <a:t>Learning rate: 1e-3, 1e-4, 1e-5</a:t>
+            </a:r>
+          </a:p>
+          <a:p>
+            <a:r>
+              <a:rPr lang="en-GB" dirty="0"/>
+              <a:t>Best hyperparameter combination: </a:t>
+            </a:r>
+            <a:r>
+              <a:rPr lang="en-GB" dirty="0" err="1"/>
+              <a:t>AdamW</a:t>
+            </a:r>
+            <a:r>
+              <a:rPr lang="en-GB" dirty="0"/>
+              <a:t>, 64, 1e-4</a:t>
+            </a:r>
+          </a:p>
+        </p:txBody>
+      </p:sp>
+      <p:sp>
+        <p:nvSpPr>
+          <p:cNvPr id="4" name="Text Placeholder 3">
+            <a:extLst>
+              <a:ext uri="{FF2B5EF4-FFF2-40B4-BE49-F238E27FC236}">
+                <a16:creationId xmlns:a16="http://schemas.microsoft.com/office/drawing/2014/main" id="{14A76E26-CD04-2EED-97F5-66F38CC29263}"/>
+              </a:ext>
+            </a:extLst>
+          </p:cNvPr>
+          <p:cNvSpPr>
+            <a:spLocks noGrp="1"/>
+          </p:cNvSpPr>
+          <p:nvPr>
+            <p:ph type="body" sz="quarter" idx="25"/>
+          </p:nvPr>
+        </p:nvSpPr>
+        <p:spPr/>
+        <p:txBody>
+          <a:bodyPr/>
+          <a:lstStyle/>
+          <a:p>
+            <a:endParaRPr lang="LID4096"/>
+          </a:p>
+        </p:txBody>
+      </p:sp>
+      <p:pic>
+        <p:nvPicPr>
+          <p:cNvPr id="6" name="Picture 5">
+            <a:extLst>
+              <a:ext uri="{FF2B5EF4-FFF2-40B4-BE49-F238E27FC236}">
+                <a16:creationId xmlns:a16="http://schemas.microsoft.com/office/drawing/2014/main" id="{0E81BE94-3A69-D2C8-6863-76ECC54018ED}"/>
+              </a:ext>
+            </a:extLst>
+          </p:cNvPr>
+          <p:cNvPicPr>
+            <a:picLocks noChangeAspect="1"/>
+          </p:cNvPicPr>
+          <p:nvPr/>
+        </p:nvPicPr>
+        <p:blipFill>
+          <a:blip r:embed="rId2"/>
+          <a:stretch>
+            <a:fillRect/>
+          </a:stretch>
+        </p:blipFill>
+        <p:spPr>
+          <a:xfrm>
+            <a:off x="3668002" y="4289258"/>
+            <a:ext cx="4855996" cy="1419724"/>
+          </a:xfrm>
+          <a:prstGeom prst="rect">
+            <a:avLst/>
+          </a:prstGeom>
+        </p:spPr>
+      </p:pic>
+    </p:spTree>
+    <p:extLst>
+      <p:ext uri="{BB962C8B-B14F-4D97-AF65-F5344CB8AC3E}">
+        <p14:creationId xmlns:p14="http://schemas.microsoft.com/office/powerpoint/2010/main" val="4100574274"/>
+      </p:ext>
+    </p:extLst>
+  </p:cSld>
+  <p:clrMapOvr>
+    <a:masterClrMapping/>
+  </p:clrMapOvr>
+</p:sld>
+</file>
+
+<file path=ppt/slides/slide7.xml><?xml version="1.0" encoding="utf-8"?>
+<p:sld xmlns:a="http://schemas.openxmlformats.org/drawingml/2006/main" xmlns:r="http://schemas.openxmlformats.org/officeDocument/2006/relationships" xmlns:p="http://schemas.openxmlformats.org/presentationml/2006/main">
+  <p:cSld>
+    <p:spTree>
+      <p:nvGrpSpPr>
+        <p:cNvPr id="1" name=""/>
+        <p:cNvGrpSpPr/>
+        <p:nvPr/>
+      </p:nvGrpSpPr>
+      <p:grpSpPr>
+        <a:xfrm>
+          <a:off x="0" y="0"/>
+          <a:ext cx="0" cy="0"/>
+          <a:chOff x="0" y="0"/>
+          <a:chExt cx="0" cy="0"/>
+        </a:xfrm>
+      </p:grpSpPr>
+      <p:sp>
+        <p:nvSpPr>
+          <p:cNvPr id="2" name="Title 1">
+            <a:extLst>
+              <a:ext uri="{FF2B5EF4-FFF2-40B4-BE49-F238E27FC236}">
+                <a16:creationId xmlns:a16="http://schemas.microsoft.com/office/drawing/2014/main" id="{DA5337F5-3B32-8045-60C2-5ADD51CE8CFC}"/>
+              </a:ext>
+            </a:extLst>
+          </p:cNvPr>
+          <p:cNvSpPr>
+            <a:spLocks noGrp="1"/>
+          </p:cNvSpPr>
+          <p:nvPr>
+            <p:ph type="title"/>
+          </p:nvPr>
+        </p:nvSpPr>
+        <p:spPr/>
+        <p:txBody>
+          <a:bodyPr/>
+          <a:lstStyle/>
+          <a:p>
+            <a:r>
+              <a:rPr lang="en-GB" dirty="0"/>
+              <a:t>Strategies to improve performance:</a:t>
+            </a:r>
+            <a:br>
+              <a:rPr lang="en-GB" dirty="0"/>
+            </a:br>
+            <a:r>
+              <a:rPr lang="en-GB" dirty="0"/>
+              <a:t>Improvement on cost</a:t>
+            </a:r>
+            <a:endParaRPr lang="LID4096" dirty="0"/>
+          </a:p>
+        </p:txBody>
+      </p:sp>
+      <p:sp>
+        <p:nvSpPr>
+          <p:cNvPr id="3" name="Content Placeholder 2">
+            <a:extLst>
+              <a:ext uri="{FF2B5EF4-FFF2-40B4-BE49-F238E27FC236}">
+                <a16:creationId xmlns:a16="http://schemas.microsoft.com/office/drawing/2014/main" id="{058313B2-FAC2-6998-8053-D56F3456DB6B}"/>
+              </a:ext>
+            </a:extLst>
+          </p:cNvPr>
+          <p:cNvSpPr>
+            <a:spLocks noGrp="1"/>
+          </p:cNvSpPr>
+          <p:nvPr>
+            <p:ph idx="1"/>
+          </p:nvPr>
+        </p:nvSpPr>
+        <p:spPr/>
+        <p:txBody>
+          <a:bodyPr/>
+          <a:lstStyle/>
+          <a:p>
+            <a:r>
+              <a:rPr lang="en-GB" dirty="0"/>
+              <a:t>A combination of the strategies was used</a:t>
+            </a:r>
+            <a:endParaRPr lang="LID4096" dirty="0"/>
+          </a:p>
+        </p:txBody>
+      </p:sp>
+      <p:sp>
+        <p:nvSpPr>
+          <p:cNvPr id="4" name="Text Placeholder 3">
+            <a:extLst>
+              <a:ext uri="{FF2B5EF4-FFF2-40B4-BE49-F238E27FC236}">
+                <a16:creationId xmlns:a16="http://schemas.microsoft.com/office/drawing/2014/main" id="{158CE112-940B-E563-BFFC-C505E946ECD5}"/>
+              </a:ext>
+            </a:extLst>
+          </p:cNvPr>
+          <p:cNvSpPr>
+            <a:spLocks noGrp="1"/>
+          </p:cNvSpPr>
+          <p:nvPr>
+            <p:ph type="body" sz="quarter" idx="25"/>
+          </p:nvPr>
+        </p:nvSpPr>
+        <p:spPr/>
+        <p:txBody>
+          <a:bodyPr/>
+          <a:lstStyle/>
+          <a:p>
+            <a:endParaRPr lang="LID4096"/>
+          </a:p>
+        </p:txBody>
+      </p:sp>
+      <p:pic>
+        <p:nvPicPr>
+          <p:cNvPr id="8" name="Picture 7" descr="A graph with green and orange lines&#10;&#10;AI-generated content may be incorrect.">
+            <a:extLst>
+              <a:ext uri="{FF2B5EF4-FFF2-40B4-BE49-F238E27FC236}">
+                <a16:creationId xmlns:a16="http://schemas.microsoft.com/office/drawing/2014/main" id="{79F40DF3-858D-1827-D15D-C7A514576DE6}"/>
+              </a:ext>
+            </a:extLst>
+          </p:cNvPr>
+          <p:cNvPicPr>
+            <a:picLocks noChangeAspect="1"/>
+          </p:cNvPicPr>
+          <p:nvPr/>
+        </p:nvPicPr>
+        <p:blipFill>
+          <a:blip r:embed="rId2">
+            <a:extLst>
+              <a:ext uri="{28A0092B-C50C-407E-A947-70E740481C1C}">
+                <a14:useLocalDpi xmlns:a14="http://schemas.microsoft.com/office/drawing/2010/main" val="0"/>
+              </a:ext>
+            </a:extLst>
+          </a:blip>
+          <a:stretch>
+            <a:fillRect/>
+          </a:stretch>
+        </p:blipFill>
+        <p:spPr>
+          <a:xfrm>
+            <a:off x="3236163" y="2076861"/>
+            <a:ext cx="5719674" cy="3990470"/>
+          </a:xfrm>
+          <a:prstGeom prst="rect">
+            <a:avLst/>
+          </a:prstGeom>
+        </p:spPr>
+      </p:pic>
+    </p:spTree>
+    <p:extLst>
+      <p:ext uri="{BB962C8B-B14F-4D97-AF65-F5344CB8AC3E}">
+        <p14:creationId xmlns:p14="http://schemas.microsoft.com/office/powerpoint/2010/main" val="2551820613"/>
       </p:ext>
     </p:extLst>
   </p:cSld>
